--- a/project/slides/iFont_全体像と現状_260804.pptx
+++ b/project/slides/iFont_全体像と現状_260804.pptx
@@ -18428,7 +18428,7 @@
                           <a:ea typeface="Yu Gothic" pitchFamily="34" charset="-122"/>
                           <a:cs typeface="Yu Gothic" pitchFamily="34" charset="-120"/>
                         </a:rPr>
-                        <a:t>練習5＋本番200</a:t>
+                        <a:t>練習5＋本番400</a:t>
                       </a:r>
                       <a:endParaRPr lang="en-US" sz="1150" dirty="0">
                         <a:latin typeface="Yu Gothic" charset="0"/>
@@ -18632,7 +18632,7 @@
                           <a:ea typeface="Yu Gothic" pitchFamily="34" charset="-122"/>
                           <a:cs typeface="Yu Gothic" pitchFamily="34" charset="-120"/>
                         </a:rPr>
-                        <a:t>前の字が残る提示の効果</a:t>
+                        <a:t>前の字が残る提示の効果（条件2水準）</a:t>
                       </a:r>
                       <a:endParaRPr lang="en-US" sz="1150" dirty="0">
                         <a:latin typeface="Yu Gothic" charset="0"/>
